--- a/classes/parte-3-hacking-etico-y-pentesting-metodologia/072-metasploit-framework-arquitectura-y-uso/clase-072-presentacion.pptx
+++ b/classes/parte-3-hacking-etico-y-pentesting-metodologia/072-metasploit-framework-arquitectura-y-uso/clase-072-presentacion.pptx
@@ -17,6 +17,9 @@
     <p:sldId id="265" r:id="rId16"/>
     <p:sldId id="266" r:id="rId17"/>
     <p:sldId id="267" r:id="rId18"/>
+    <p:sldId id="268" r:id="rId19"/>
+    <p:sldId id="269" r:id="rId20"/>
+    <p:sldId id="270" r:id="rId21"/>
   </p:sldIdLst>
   <p:sldSz cx="9144000" cy="6858000" type="screen4x3"/>
   <p:notesSz cx="6858000" cy="9144000"/>
@@ -3198,7 +3201,7 @@
                   <a:srgbClr val="0B3D2E"/>
                 </a:solidFill>
               </a:rPr>
-              <a:t>⚠️ Errores comunes</a:t>
+              <a:t>✍️ Ejercicios</a:t>
             </a:r>
           </a:p>
         </p:txBody>
@@ -3236,82 +3239,82 @@
                   <a:srgbClr val="22282E"/>
                 </a:solidFill>
               </a:rPr>
-              <a:t>•  dbstatus responde "No connection" — PostgreSQL detenido o msfdb no inicializada; ejecutar sudo systemctl start postgresql y luego msfdb init</a:t>
-            </a:r>
-          </a:p>
-          <a:p>
-            <a:pPr>
-              <a:spcAft>
-                <a:spcPts val="600"/>
-              </a:spcAft>
-            </a:pPr>
-            <a:r>
-              <a:rPr sz="1500">
-                <a:solidFill>
-                  <a:srgbClr val="22282E"/>
-                </a:solidFill>
-              </a:rPr>
-              <a:t>•  search devuelve cientos de resultados — Búsqueda sin filtros; usar type:, platform: o cve: para acotar</a:t>
-            </a:r>
-          </a:p>
-          <a:p>
-            <a:pPr>
-              <a:spcAft>
-                <a:spcPts val="600"/>
-              </a:spcAft>
-            </a:pPr>
-            <a:r>
-              <a:rPr sz="1500">
-                <a:solidFill>
-                  <a:srgbClr val="22282E"/>
-                </a:solidFill>
-              </a:rPr>
-              <a:t>•  Las opciones no persisten al cambiar de módulo — Se usó set en lugar de setg para variables comunes como RHOSTS/LHOST</a:t>
-            </a:r>
-          </a:p>
-          <a:p>
-            <a:pPr>
-              <a:spcAft>
-                <a:spcPts val="600"/>
-              </a:spcAft>
-            </a:pPr>
-            <a:r>
-              <a:rPr sz="1500">
-                <a:solidFill>
-                  <a:srgbClr val="22282E"/>
-                </a:solidFill>
-              </a:rPr>
-              <a:t>•  dbnmap corre pero no aparece nada en hosts — No hay workspace activo o la base de datos no está conectada; verificar con dbstatus y workspace</a:t>
-            </a:r>
-          </a:p>
-          <a:p>
-            <a:pPr>
-              <a:spcAft>
-                <a:spcPts val="600"/>
-              </a:spcAft>
-            </a:pPr>
-            <a:r>
-              <a:rPr sz="1500">
-                <a:solidFill>
-                  <a:srgbClr val="22282E"/>
-                </a:solidFill>
-              </a:rPr>
-              <a:t>•  El módulo buscado no existe — Ruta escrita a mano con errores; copiar el path exacto que devuelve search</a:t>
-            </a:r>
-          </a:p>
-          <a:p>
-            <a:pPr>
-              <a:spcAft>
-                <a:spcPts val="600"/>
-              </a:spcAft>
-            </a:pPr>
-            <a:r>
-              <a:rPr sz="1500">
-                <a:solidFill>
-                  <a:srgbClr val="22282E"/>
-                </a:solidFill>
-              </a:rPr>
-              <a:t>•  msfconsole tarda mucho en arrancar — Está reconstruyendo la caché de módulos tras una actualización; es normal la primera vez, esperar</a:t>
+              <a:t>•  Explica la diferencia entre set y setg con un ejemplo concreto de RHOSTS y LHOST.</a:t>
+            </a:r>
+          </a:p>
+          <a:p>
+            <a:pPr>
+              <a:spcAft>
+                <a:spcPts val="600"/>
+              </a:spcAft>
+            </a:pPr>
+            <a:r>
+              <a:rPr sz="1500">
+                <a:solidFill>
+                  <a:srgbClr val="22282E"/>
+                </a:solidFill>
+              </a:rPr>
+              <a:t>•  Enumera los seis tipos de módulos de Metasploit y da un caso de uso real de cada uno.</a:t>
+            </a:r>
+          </a:p>
+          <a:p>
+            <a:pPr>
+              <a:spcAft>
+                <a:spcPts val="600"/>
+              </a:spcAft>
+            </a:pPr>
+            <a:r>
+              <a:rPr sz="1500">
+                <a:solidFill>
+                  <a:srgbClr val="22282E"/>
+                </a:solidFill>
+              </a:rPr>
+              <a:t>•  Importa un archivo XML de Nmap generado previamente con dbimport y verifica los hosts cargados.</a:t>
+            </a:r>
+          </a:p>
+          <a:p>
+            <a:pPr>
+              <a:spcAft>
+                <a:spcPts val="600"/>
+              </a:spcAft>
+            </a:pPr>
+            <a:r>
+              <a:rPr sz="1500">
+                <a:solidFill>
+                  <a:srgbClr val="22282E"/>
+                </a:solidFill>
+              </a:rPr>
+              <a:t>•  Usa un módulo auxiliar para detectar la versión de SSH del objetivo de laboratorio.</a:t>
+            </a:r>
+          </a:p>
+          <a:p>
+            <a:pPr>
+              <a:spcAft>
+                <a:spcPts val="600"/>
+              </a:spcAft>
+            </a:pPr>
+            <a:r>
+              <a:rPr sz="1500">
+                <a:solidFill>
+                  <a:srgbClr val="22282E"/>
+                </a:solidFill>
+              </a:rPr>
+              <a:t>•  Crea dos workspaces distintos y demuestra, mostrando hosts en cada uno, que los datos no se mezclan.</a:t>
+            </a:r>
+          </a:p>
+          <a:p>
+            <a:pPr>
+              <a:spcAft>
+                <a:spcPts val="600"/>
+              </a:spcAft>
+            </a:pPr>
+            <a:r>
+              <a:rPr sz="1500">
+                <a:solidFill>
+                  <a:srgbClr val="22282E"/>
+                </a:solidFill>
+              </a:rPr>
+              <a:t>•  Filtra módulos con search combinando type:exploit y platform:unix y explica qué representa cada filtro.</a:t>
             </a:r>
           </a:p>
         </p:txBody>
@@ -3362,7 +3365,7 @@
                   <a:srgbClr val="0B3D2E"/>
                 </a:solidFill>
               </a:rPr>
-              <a:t>❓ Preguntas frecuentes</a:t>
+              <a:t>📝 Reto verificable</a:t>
             </a:r>
           </a:p>
         </p:txBody>
@@ -3400,97 +3403,22 @@
                   <a:srgbClr val="22282E"/>
                 </a:solidFill>
               </a:rPr>
-              <a:t>•  ❓ ¿Necesito obligatoriamente la base de datos para usar Metasploit?</a:t>
-            </a:r>
-          </a:p>
-          <a:p>
-            <a:pPr>
-              <a:spcAft>
-                <a:spcPts val="600"/>
-              </a:spcAft>
-            </a:pPr>
-            <a:r>
-              <a:rPr sz="1500">
-                <a:solidFill>
-                  <a:srgbClr val="22282E"/>
-                </a:solidFill>
-              </a:rPr>
-              <a:t>•  No es obligatoria para lanzar un único exploit, pero es muy recomendable en cualquier engagement real: persiste hosts, servicios, credenciales y loot entre sesiones, algo esencial cuando hay múltiples objetivos.</a:t>
-            </a:r>
-          </a:p>
-          <a:p>
-            <a:pPr>
-              <a:spcAft>
-                <a:spcPts val="600"/>
-              </a:spcAft>
-            </a:pPr>
-            <a:r>
-              <a:rPr sz="1500">
-                <a:solidFill>
-                  <a:srgbClr val="22282E"/>
-                </a:solidFill>
-              </a:rPr>
-              <a:t>•  ❓ ¿Cuál es la diferencia real entre un módulo auxiliary y un exploit?</a:t>
-            </a:r>
-          </a:p>
-          <a:p>
-            <a:pPr>
-              <a:spcAft>
-                <a:spcPts val="600"/>
-              </a:spcAft>
-            </a:pPr>
-            <a:r>
-              <a:rPr sz="1500">
-                <a:solidFill>
-                  <a:srgbClr val="22282E"/>
-                </a:solidFill>
-              </a:rPr>
-              <a:t>•  Los módulos auxiliary no entregan un payload ni buscan ejecución de código; sirven para escaneo, enumeración o fuerza bruta. Los exploit sí buscan ejecutar código en el objetivo y siempre se combinan con un payload.</a:t>
-            </a:r>
-          </a:p>
-          <a:p>
-            <a:pPr>
-              <a:spcAft>
-                <a:spcPts val="600"/>
-              </a:spcAft>
-            </a:pPr>
-            <a:r>
-              <a:rPr sz="1500">
-                <a:solidFill>
-                  <a:srgbClr val="22282E"/>
-                </a:solidFill>
-              </a:rPr>
-              <a:t>•  ❓ ¿Metasploit Pro aporta mucho valor sobre el Framework gratuito?</a:t>
-            </a:r>
-          </a:p>
-          <a:p>
-            <a:pPr>
-              <a:spcAft>
-                <a:spcPts val="600"/>
-              </a:spcAft>
-            </a:pPr>
-            <a:r>
-              <a:rPr sz="1500">
-                <a:solidFill>
-                  <a:srgbClr val="22282E"/>
-                </a:solidFill>
-              </a:rPr>
-              <a:t>•  Pro añade automatización de flujos, generación de informes y una interfaz gráfica, pero el Framework gratuito cubre la enorme mayoría del contenido técnico necesario para aprender y para ejecutar engagements reales.</a:t>
-            </a:r>
-          </a:p>
-          <a:p>
-            <a:pPr>
-              <a:spcAft>
-                <a:spcPts val="600"/>
-              </a:spcAft>
-            </a:pPr>
-            <a:r>
-              <a:rPr sz="1500">
-                <a:solidFill>
-                  <a:srgbClr val="22282E"/>
-                </a:solidFill>
-              </a:rPr>
-              <a:t>•  ❓ ¿Puedo agregar mis propios módulos a Metasploit?</a:t>
+              <a:t>•  Reto: Dejar un workspace de laboratorio completamente poblado: hosts descubiertos, servicios con versión importados desde Nmap, y al menos un módulo auxiliar ejecutado con su resultado documentado.</a:t>
+            </a:r>
+          </a:p>
+          <a:p>
+            <a:pPr>
+              <a:spcAft>
+                <a:spcPts val="600"/>
+              </a:spcAft>
+            </a:pPr>
+            <a:r>
+              <a:rPr sz="1500">
+                <a:solidFill>
+                  <a:srgbClr val="22282E"/>
+                </a:solidFill>
+              </a:rPr>
+              <a:t>•  Criterio de aceptación: el comando hosts muestra el objetivo de laboratorio, services lista al menos tres servicios con su versión, y existe al menos una entrada generada por un módulo auxiliar…</a:t>
             </a:r>
           </a:p>
         </p:txBody>
@@ -3541,7 +3469,7 @@
                   <a:srgbClr val="0B3D2E"/>
                 </a:solidFill>
               </a:rPr>
-              <a:t>🔗 Referencias</a:t>
+              <a:t>⚠️ Errores comunes</a:t>
             </a:r>
           </a:p>
         </p:txBody>
@@ -3579,6 +3507,349 @@
                   <a:srgbClr val="22282E"/>
                 </a:solidFill>
               </a:rPr>
+              <a:t>•  dbstatus responde "No connection" — PostgreSQL detenido o msfdb no inicializada; ejecutar sudo systemctl start postgresql y luego msfdb init</a:t>
+            </a:r>
+          </a:p>
+          <a:p>
+            <a:pPr>
+              <a:spcAft>
+                <a:spcPts val="600"/>
+              </a:spcAft>
+            </a:pPr>
+            <a:r>
+              <a:rPr sz="1500">
+                <a:solidFill>
+                  <a:srgbClr val="22282E"/>
+                </a:solidFill>
+              </a:rPr>
+              <a:t>•  search devuelve cientos de resultados — Búsqueda sin filtros; usar type:, platform: o cve: para acotar</a:t>
+            </a:r>
+          </a:p>
+          <a:p>
+            <a:pPr>
+              <a:spcAft>
+                <a:spcPts val="600"/>
+              </a:spcAft>
+            </a:pPr>
+            <a:r>
+              <a:rPr sz="1500">
+                <a:solidFill>
+                  <a:srgbClr val="22282E"/>
+                </a:solidFill>
+              </a:rPr>
+              <a:t>•  Las opciones no persisten al cambiar de módulo — Se usó set en lugar de setg para variables comunes como RHOSTS/LHOST</a:t>
+            </a:r>
+          </a:p>
+          <a:p>
+            <a:pPr>
+              <a:spcAft>
+                <a:spcPts val="600"/>
+              </a:spcAft>
+            </a:pPr>
+            <a:r>
+              <a:rPr sz="1500">
+                <a:solidFill>
+                  <a:srgbClr val="22282E"/>
+                </a:solidFill>
+              </a:rPr>
+              <a:t>•  dbnmap corre pero no aparece nada en hosts — No hay workspace activo o la base de datos no está conectada; verificar con dbstatus y workspace</a:t>
+            </a:r>
+          </a:p>
+          <a:p>
+            <a:pPr>
+              <a:spcAft>
+                <a:spcPts val="600"/>
+              </a:spcAft>
+            </a:pPr>
+            <a:r>
+              <a:rPr sz="1500">
+                <a:solidFill>
+                  <a:srgbClr val="22282E"/>
+                </a:solidFill>
+              </a:rPr>
+              <a:t>•  El módulo buscado no existe — Ruta escrita a mano con errores; copiar el path exacto que devuelve search</a:t>
+            </a:r>
+          </a:p>
+          <a:p>
+            <a:pPr>
+              <a:spcAft>
+                <a:spcPts val="600"/>
+              </a:spcAft>
+            </a:pPr>
+            <a:r>
+              <a:rPr sz="1500">
+                <a:solidFill>
+                  <a:srgbClr val="22282E"/>
+                </a:solidFill>
+              </a:rPr>
+              <a:t>•  msfconsole tarda mucho en arrancar — Está reconstruyendo la caché de módulos tras una actualización; es normal la primera vez, esperar</a:t>
+            </a:r>
+          </a:p>
+        </p:txBody>
+      </p:sp>
+    </p:spTree>
+  </p:cSld>
+  <p:clrMapOvr>
+    <a:masterClrMapping/>
+  </p:clrMapOvr>
+</p:sld>
+</file>
+
+<file path=ppt/slides/slide13.xml><?xml version="1.0" encoding="utf-8"?>
+<p:sld xmlns:a="http://schemas.openxmlformats.org/drawingml/2006/main" xmlns:p="http://schemas.openxmlformats.org/presentationml/2006/main" xmlns:r="http://schemas.openxmlformats.org/officeDocument/2006/relationships">
+  <p:cSld>
+    <p:spTree>
+      <p:nvGrpSpPr>
+        <p:cNvPr id="1" name=""/>
+        <p:cNvGrpSpPr/>
+        <p:nvPr/>
+      </p:nvGrpSpPr>
+      <p:grpSpPr/>
+      <p:sp>
+        <p:nvSpPr>
+          <p:cNvPr id="2" name="TextBox 1"/>
+          <p:cNvSpPr txBox="1"/>
+          <p:nvPr/>
+        </p:nvSpPr>
+        <p:spPr>
+          <a:xfrm>
+            <a:off x="457200" y="320040"/>
+            <a:ext cx="8229600" cy="822960"/>
+          </a:xfrm>
+          <a:prstGeom prst="rect">
+            <a:avLst/>
+          </a:prstGeom>
+          <a:noFill/>
+        </p:spPr>
+        <p:txBody>
+          <a:bodyPr wrap="square">
+            <a:spAutoFit/>
+          </a:bodyPr>
+          <a:lstStyle/>
+          <a:p>
+            <a:r>
+              <a:rPr sz="2600" b="1">
+                <a:solidFill>
+                  <a:srgbClr val="0B3D2E"/>
+                </a:solidFill>
+              </a:rPr>
+              <a:t>❓ Preguntas frecuentes</a:t>
+            </a:r>
+          </a:p>
+        </p:txBody>
+      </p:sp>
+      <p:sp>
+        <p:nvSpPr>
+          <p:cNvPr id="3" name="TextBox 2"/>
+          <p:cNvSpPr txBox="1"/>
+          <p:nvPr/>
+        </p:nvSpPr>
+        <p:spPr>
+          <a:xfrm>
+            <a:off x="457200" y="1280160"/>
+            <a:ext cx="8229600" cy="4937760"/>
+          </a:xfrm>
+          <a:prstGeom prst="rect">
+            <a:avLst/>
+          </a:prstGeom>
+          <a:noFill/>
+        </p:spPr>
+        <p:txBody>
+          <a:bodyPr wrap="square">
+            <a:spAutoFit/>
+          </a:bodyPr>
+          <a:lstStyle/>
+          <a:p>
+            <a:pPr>
+              <a:spcAft>
+                <a:spcPts val="600"/>
+              </a:spcAft>
+            </a:pPr>
+            <a:r>
+              <a:rPr sz="1500">
+                <a:solidFill>
+                  <a:srgbClr val="22282E"/>
+                </a:solidFill>
+              </a:rPr>
+              <a:t>•  ❓ ¿Necesito obligatoriamente la base de datos para usar Metasploit?</a:t>
+            </a:r>
+          </a:p>
+          <a:p>
+            <a:pPr>
+              <a:spcAft>
+                <a:spcPts val="600"/>
+              </a:spcAft>
+            </a:pPr>
+            <a:r>
+              <a:rPr sz="1500">
+                <a:solidFill>
+                  <a:srgbClr val="22282E"/>
+                </a:solidFill>
+              </a:rPr>
+              <a:t>•  No es obligatoria para lanzar un único exploit, pero es muy recomendable en cualquier engagement real: persiste hosts, servicios, credenciales y loot entre sesiones, algo esencial cuando hay…</a:t>
+            </a:r>
+          </a:p>
+          <a:p>
+            <a:pPr>
+              <a:spcAft>
+                <a:spcPts val="600"/>
+              </a:spcAft>
+            </a:pPr>
+            <a:r>
+              <a:rPr sz="1500">
+                <a:solidFill>
+                  <a:srgbClr val="22282E"/>
+                </a:solidFill>
+              </a:rPr>
+              <a:t>•  ❓ ¿Cuál es la diferencia real entre un módulo auxiliary y un exploit?</a:t>
+            </a:r>
+          </a:p>
+          <a:p>
+            <a:pPr>
+              <a:spcAft>
+                <a:spcPts val="600"/>
+              </a:spcAft>
+            </a:pPr>
+            <a:r>
+              <a:rPr sz="1500">
+                <a:solidFill>
+                  <a:srgbClr val="22282E"/>
+                </a:solidFill>
+              </a:rPr>
+              <a:t>•  Los módulos auxiliary no entregan un payload ni buscan ejecución de código; sirven para escaneo, enumeración o fuerza bruta. Los exploit sí buscan ejecutar código en el objetivo y siempre se combinan…</a:t>
+            </a:r>
+          </a:p>
+          <a:p>
+            <a:pPr>
+              <a:spcAft>
+                <a:spcPts val="600"/>
+              </a:spcAft>
+            </a:pPr>
+            <a:r>
+              <a:rPr sz="1500">
+                <a:solidFill>
+                  <a:srgbClr val="22282E"/>
+                </a:solidFill>
+              </a:rPr>
+              <a:t>•  ❓ ¿Metasploit Pro aporta mucho valor sobre el Framework gratuito?</a:t>
+            </a:r>
+          </a:p>
+          <a:p>
+            <a:pPr>
+              <a:spcAft>
+                <a:spcPts val="600"/>
+              </a:spcAft>
+            </a:pPr>
+            <a:r>
+              <a:rPr sz="1500">
+                <a:solidFill>
+                  <a:srgbClr val="22282E"/>
+                </a:solidFill>
+              </a:rPr>
+              <a:t>•  Pro añade automatización de flujos, generación de informes y una interfaz gráfica, pero el Framework gratuito cubre la enorme mayoría del contenido técnico necesario para aprender y para ejecutar…</a:t>
+            </a:r>
+          </a:p>
+          <a:p>
+            <a:pPr>
+              <a:spcAft>
+                <a:spcPts val="600"/>
+              </a:spcAft>
+            </a:pPr>
+            <a:r>
+              <a:rPr sz="1500">
+                <a:solidFill>
+                  <a:srgbClr val="22282E"/>
+                </a:solidFill>
+              </a:rPr>
+              <a:t>•  ❓ ¿Puedo agregar mis propios módulos a Metasploit?</a:t>
+            </a:r>
+          </a:p>
+        </p:txBody>
+      </p:sp>
+    </p:spTree>
+  </p:cSld>
+  <p:clrMapOvr>
+    <a:masterClrMapping/>
+  </p:clrMapOvr>
+</p:sld>
+</file>
+
+<file path=ppt/slides/slide14.xml><?xml version="1.0" encoding="utf-8"?>
+<p:sld xmlns:a="http://schemas.openxmlformats.org/drawingml/2006/main" xmlns:p="http://schemas.openxmlformats.org/presentationml/2006/main" xmlns:r="http://schemas.openxmlformats.org/officeDocument/2006/relationships">
+  <p:cSld>
+    <p:spTree>
+      <p:nvGrpSpPr>
+        <p:cNvPr id="1" name=""/>
+        <p:cNvGrpSpPr/>
+        <p:nvPr/>
+      </p:nvGrpSpPr>
+      <p:grpSpPr/>
+      <p:sp>
+        <p:nvSpPr>
+          <p:cNvPr id="2" name="TextBox 1"/>
+          <p:cNvSpPr txBox="1"/>
+          <p:nvPr/>
+        </p:nvSpPr>
+        <p:spPr>
+          <a:xfrm>
+            <a:off x="457200" y="320040"/>
+            <a:ext cx="8229600" cy="822960"/>
+          </a:xfrm>
+          <a:prstGeom prst="rect">
+            <a:avLst/>
+          </a:prstGeom>
+          <a:noFill/>
+        </p:spPr>
+        <p:txBody>
+          <a:bodyPr wrap="square">
+            <a:spAutoFit/>
+          </a:bodyPr>
+          <a:lstStyle/>
+          <a:p>
+            <a:r>
+              <a:rPr sz="2600" b="1">
+                <a:solidFill>
+                  <a:srgbClr val="0B3D2E"/>
+                </a:solidFill>
+              </a:rPr>
+              <a:t>🔗 Referencias</a:t>
+            </a:r>
+          </a:p>
+        </p:txBody>
+      </p:sp>
+      <p:sp>
+        <p:nvSpPr>
+          <p:cNvPr id="3" name="TextBox 2"/>
+          <p:cNvSpPr txBox="1"/>
+          <p:nvPr/>
+        </p:nvSpPr>
+        <p:spPr>
+          <a:xfrm>
+            <a:off x="457200" y="1280160"/>
+            <a:ext cx="8229600" cy="4937760"/>
+          </a:xfrm>
+          <a:prstGeom prst="rect">
+            <a:avLst/>
+          </a:prstGeom>
+          <a:noFill/>
+        </p:spPr>
+        <p:txBody>
+          <a:bodyPr wrap="square">
+            <a:spAutoFit/>
+          </a:bodyPr>
+          <a:lstStyle/>
+          <a:p>
+            <a:pPr>
+              <a:spcAft>
+                <a:spcPts val="600"/>
+              </a:spcAft>
+            </a:pPr>
+            <a:r>
+              <a:rPr sz="1500">
+                <a:solidFill>
+                  <a:srgbClr val="22282E"/>
+                </a:solidFill>
+              </a:rPr>
               <a:t>•  Kennedy, D. et al. "Metasploit: The Penetration Tester's Guide" (No Starch Press) — referencia histórica de arquitectura del framework.</a:t>
             </a:r>
           </a:p>
@@ -3644,6 +3915,81 @@
           </a:p>
         </p:txBody>
       </p:sp>
+    </p:spTree>
+  </p:cSld>
+  <p:clrMapOvr>
+    <a:masterClrMapping/>
+  </p:clrMapOvr>
+</p:sld>
+</file>
+
+<file path=ppt/slides/slide15.xml><?xml version="1.0" encoding="utf-8"?>
+<p:sld xmlns:a="http://schemas.openxmlformats.org/drawingml/2006/main" xmlns:p="http://schemas.openxmlformats.org/presentationml/2006/main" xmlns:r="http://schemas.openxmlformats.org/officeDocument/2006/relationships">
+  <p:cSld>
+    <p:spTree>
+      <p:nvGrpSpPr>
+        <p:cNvPr id="1" name=""/>
+        <p:cNvGrpSpPr/>
+        <p:nvPr/>
+      </p:nvGrpSpPr>
+      <p:grpSpPr/>
+      <p:sp>
+        <p:nvSpPr>
+          <p:cNvPr id="2" name="TextBox 1"/>
+          <p:cNvSpPr txBox="1"/>
+          <p:nvPr/>
+        </p:nvSpPr>
+        <p:spPr>
+          <a:xfrm>
+            <a:off x="457200" y="274320"/>
+            <a:ext cx="8229600" cy="640080"/>
+          </a:xfrm>
+          <a:prstGeom prst="rect">
+            <a:avLst/>
+          </a:prstGeom>
+          <a:noFill/>
+        </p:spPr>
+        <p:txBody>
+          <a:bodyPr wrap="square">
+            <a:spAutoFit/>
+          </a:bodyPr>
+          <a:lstStyle/>
+          <a:p>
+            <a:r>
+              <a:rPr sz="2200" b="1">
+                <a:solidFill>
+                  <a:srgbClr val="0B3D2E"/>
+                </a:solidFill>
+              </a:rPr>
+              <a:t>Diagrama de la clase</a:t>
+            </a:r>
+          </a:p>
+        </p:txBody>
+      </p:sp>
+      <p:pic>
+        <p:nvPicPr>
+          <p:cNvPr id="3" name="Picture 2" descr="b65f3c82c41cef4b.png"/>
+          <p:cNvPicPr>
+            <a:picLocks noChangeAspect="1"/>
+          </p:cNvPicPr>
+          <p:nvPr/>
+        </p:nvPicPr>
+        <p:blipFill>
+          <a:blip r:embed="rId2"/>
+          <a:stretch>
+            <a:fillRect/>
+          </a:stretch>
+        </p:blipFill>
+        <p:spPr>
+          <a:xfrm>
+            <a:off x="457200" y="3232404"/>
+            <a:ext cx="8229600" cy="1033272"/>
+          </a:xfrm>
+          <a:prstGeom prst="rect">
+            <a:avLst/>
+          </a:prstGeom>
+        </p:spPr>
+      </p:pic>
     </p:spTree>
   </p:cSld>
   <p:clrMapOvr>
@@ -3728,7 +4074,7 @@
                   <a:srgbClr val="22282E"/>
                 </a:solidFill>
               </a:rPr>
-              <a:t>•  El alumno comprenderá la arquitectura interna de Metasploit Framework —módulos, datastore, base de datos y workspaces— y adquirirá soltura operando msfconsole: buscar módulos, leer su documentación, configurar opciones y encadenar reconocimiento con explotación. Esta clase es la base técnica sobre la que se apoyan las tres clases siguientes del curso (explotación, Meterpreter y msfvenom).</a:t>
+              <a:t>•  El alumno comprenderá la arquitectura interna de Metasploit Framework —módulos, datastore, base de datos y workspaces— y adquirirá soltura operando msfconsole: buscar módulos, leer su documentación…</a:t>
             </a:r>
           </a:p>
         </p:txBody>
@@ -4137,7 +4483,7 @@
                   <a:srgbClr val="0B3D2E"/>
                 </a:solidFill>
               </a:rPr>
-              <a:t>📖 Definiciones y características</a:t>
+              <a:t>🧠 Explicación en profundidad</a:t>
             </a:r>
           </a:p>
         </p:txBody>
@@ -4175,97 +4521,97 @@
                   <a:srgbClr val="22282E"/>
                 </a:solidFill>
               </a:rPr>
-              <a:t>•  Exploit: módulo que aprovecha una vulnerabilidad específica de un servicio o software. Característica clave: siempre se combina con un payload para lograr ejecución de código en el objetivo.</a:t>
-            </a:r>
-          </a:p>
-          <a:p>
-            <a:pPr>
-              <a:spcAft>
-                <a:spcPts val="600"/>
-              </a:spcAft>
-            </a:pPr>
-            <a:r>
-              <a:rPr sz="1500">
-                <a:solidFill>
-                  <a:srgbClr val="22282E"/>
-                </a:solidFill>
-              </a:rPr>
-              <a:t>•  Payload: código que se ejecuta tras una explotación exitosa (ej. shell de comandos, Meterpreter). Característica clave: puede ser staged (se envía en etapas) o stageless (se envía completo de una vez).</a:t>
-            </a:r>
-          </a:p>
-          <a:p>
-            <a:pPr>
-              <a:spcAft>
-                <a:spcPts val="600"/>
-              </a:spcAft>
-            </a:pPr>
-            <a:r>
-              <a:rPr sz="1500">
-                <a:solidFill>
-                  <a:srgbClr val="22282E"/>
-                </a:solidFill>
-              </a:rPr>
-              <a:t>•  Auxiliary: módulo sin payload asociado, usado para escaneo, fuzzing o fuerza bruta. Característica clave: es la herramienta principal para enumeración profunda dentro del propio framework.</a:t>
-            </a:r>
-          </a:p>
-          <a:p>
-            <a:pPr>
-              <a:spcAft>
-                <a:spcPts val="600"/>
-              </a:spcAft>
-            </a:pPr>
-            <a:r>
-              <a:rPr sz="1500">
-                <a:solidFill>
-                  <a:srgbClr val="22282E"/>
-                </a:solidFill>
-              </a:rPr>
-              <a:t>•  Post: módulo que se ejecuta sobre una sesión ya establecida. Característica clave: automatiza tareas de post-explotación como recolección de credenciales o información del sistema.</a:t>
-            </a:r>
-          </a:p>
-          <a:p>
-            <a:pPr>
-              <a:spcAft>
-                <a:spcPts val="600"/>
-              </a:spcAft>
-            </a:pPr>
-            <a:r>
-              <a:rPr sz="1500">
-                <a:solidFill>
-                  <a:srgbClr val="22282E"/>
-                </a:solidFill>
-              </a:rPr>
-              <a:t>•  Datastore: almacén interno de variables de configuración (RHOSTS, LHOST, LPORT, etc.). Característica clave: setg fija un valor global visible para todos los módulos, mientras set lo fija solo para el módulo activo.</a:t>
-            </a:r>
-          </a:p>
-          <a:p>
-            <a:pPr>
-              <a:spcAft>
-                <a:spcPts val="600"/>
-              </a:spcAft>
-            </a:pPr>
-            <a:r>
-              <a:rPr sz="1500">
-                <a:solidFill>
-                  <a:srgbClr val="22282E"/>
-                </a:solidFill>
-              </a:rPr>
-              <a:t>•  Workspace: contenedor lógico dentro de la base de datos de Metasploit que agrupa hosts, servicios y hallazgos de un mismo engagement. Característica clave: separa físicamente los datos de distintos clientes o VMs de laboratorio.</a:t>
-            </a:r>
-          </a:p>
-          <a:p>
-            <a:pPr>
-              <a:spcAft>
-                <a:spcPts val="600"/>
-              </a:spcAft>
-            </a:pPr>
-            <a:r>
-              <a:rPr sz="1500">
-                <a:solidFill>
-                  <a:srgbClr val="22282E"/>
-                </a:solidFill>
-              </a:rPr>
-              <a:t>•  msfdb: utilidad de inicialización y gestión de la base de datos PostgreSQL que respalda a Metasploit. Característica clave: sin ella, Metasploit funciona pero pierde persistencia entre sesiones.</a:t>
+              <a:t>•  Metasploit es el marco de explotación más usado del mundo, y su valor no está en tener</a:t>
+            </a:r>
+          </a:p>
+          <a:p>
+            <a:pPr>
+              <a:spcAft>
+                <a:spcPts val="600"/>
+              </a:spcAft>
+            </a:pPr>
+            <a:r>
+              <a:rPr sz="1500">
+                <a:solidFill>
+                  <a:srgbClr val="22282E"/>
+                </a:solidFill>
+              </a:rPr>
+              <a:t>•  muchos exploits sino en estandarizar la cadena de ataque: descubrir, explotar, cargar un</a:t>
+            </a:r>
+          </a:p>
+          <a:p>
+            <a:pPr>
+              <a:spcAft>
+                <a:spcPts val="600"/>
+              </a:spcAft>
+            </a:pPr>
+            <a:r>
+              <a:rPr sz="1500">
+                <a:solidFill>
+                  <a:srgbClr val="22282E"/>
+                </a:solidFill>
+              </a:rPr>
+              <a:t>•  payload, mantener acceso y hacer post-explotación, todo con una interfaz común y una base de</a:t>
+            </a:r>
+          </a:p>
+          <a:p>
+            <a:pPr>
+              <a:spcAft>
+                <a:spcPts val="600"/>
+              </a:spcAft>
+            </a:pPr>
+            <a:r>
+              <a:rPr sz="1500">
+                <a:solidFill>
+                  <a:srgbClr val="22282E"/>
+                </a:solidFill>
+              </a:rPr>
+              <a:t>•  datos que recuerda lo aprendido. Entender su arquitectura de módulos es lo que separa</a:t>
+            </a:r>
+          </a:p>
+          <a:p>
+            <a:pPr>
+              <a:spcAft>
+                <a:spcPts val="600"/>
+              </a:spcAft>
+            </a:pPr>
+            <a:r>
+              <a:rPr sz="1500">
+                <a:solidFill>
+                  <a:srgbClr val="22282E"/>
+                </a:solidFill>
+              </a:rPr>
+              <a:t>•  usarlo con criterio de copiar comandos.</a:t>
+            </a:r>
+          </a:p>
+          <a:p>
+            <a:pPr>
+              <a:spcAft>
+                <a:spcPts val="600"/>
+              </a:spcAft>
+            </a:pPr>
+            <a:r>
+              <a:rPr sz="1500">
+                <a:solidFill>
+                  <a:srgbClr val="22282E"/>
+                </a:solidFill>
+              </a:rPr>
+              <a:t>•  Hay seis tipos de módulo, y cada uno cumple un rol distinto en la cadena. Los exploits</a:t>
+            </a:r>
+          </a:p>
+          <a:p>
+            <a:pPr>
+              <a:spcAft>
+                <a:spcPts val="600"/>
+              </a:spcAft>
+            </a:pPr>
+            <a:r>
+              <a:rPr sz="1500">
+                <a:solidFill>
+                  <a:srgbClr val="22282E"/>
+                </a:solidFill>
+              </a:rPr>
+              <a:t>•  aprovechan una vulnerabilidad concreta para conseguir ejecución. Los payloads son el</a:t>
             </a:r>
           </a:p>
         </p:txBody>
@@ -4316,7 +4662,7 @@
                   <a:srgbClr val="0B3D2E"/>
                 </a:solidFill>
               </a:rPr>
-              <a:t>🧰 Herramientas y preparación</a:t>
+              <a:t>📖 Definiciones y características</a:t>
             </a:r>
           </a:p>
         </p:txBody>
@@ -4354,97 +4700,97 @@
                   <a:srgbClr val="22282E"/>
                 </a:solidFill>
               </a:rPr>
-              <a:t>•  Kali Linux o Parrot OS con Metasploit Framework preinstalado (msfconsole --version para confirmar).</a:t>
-            </a:r>
-          </a:p>
-          <a:p>
-            <a:pPr>
-              <a:spcAft>
-                <a:spcPts val="600"/>
-              </a:spcAft>
-            </a:pPr>
-            <a:r>
-              <a:rPr sz="1500">
-                <a:solidFill>
-                  <a:srgbClr val="22282E"/>
-                </a:solidFill>
-              </a:rPr>
-              <a:t>•  PostgreSQL como backend de base de datos, gestionado por msfdb.</a:t>
-            </a:r>
-          </a:p>
-          <a:p>
-            <a:pPr>
-              <a:spcAft>
-                <a:spcPts val="600"/>
-              </a:spcAft>
-            </a:pPr>
-            <a:r>
-              <a:rPr sz="1500">
-                <a:solidFill>
-                  <a:srgbClr val="22282E"/>
-                </a:solidFill>
-              </a:rPr>
-              <a:t>•  Metasploitable2 desplegada en una red interna aislada (host-only) como objetivo de laboratorio.</a:t>
-            </a:r>
-          </a:p>
-          <a:p>
-            <a:pPr>
-              <a:spcAft>
-                <a:spcPts val="600"/>
-              </a:spcAft>
-            </a:pPr>
-            <a:r>
-              <a:rPr sz="1500">
-                <a:solidFill>
-                  <a:srgbClr val="22282E"/>
-                </a:solidFill>
-              </a:rPr>
-              <a:t>•  Nmap para el reconocimiento previo que luego se importará a Metasploit.</a:t>
-            </a:r>
-          </a:p>
-          <a:p>
-            <a:pPr>
-              <a:spcAft>
-                <a:spcPts val="600"/>
-              </a:spcAft>
-            </a:pPr>
-            <a:r>
-              <a:rPr sz="1500">
-                <a:solidFill>
-                  <a:srgbClr val="22282E"/>
-                </a:solidFill>
-              </a:rPr>
-              <a:t>•  Inicialización recomendada:</a:t>
-            </a:r>
-          </a:p>
-          <a:p>
-            <a:pPr>
-              <a:spcAft>
-                <a:spcPts val="600"/>
-              </a:spcAft>
-            </a:pPr>
-            <a:r>
-              <a:rPr sz="1500">
-                <a:solidFill>
-                  <a:srgbClr val="22282E"/>
-                </a:solidFill>
-              </a:rPr>
-              <a:t>•  sudo msfdb init</a:t>
-            </a:r>
-          </a:p>
-          <a:p>
-            <a:pPr>
-              <a:spcAft>
-                <a:spcPts val="600"/>
-              </a:spcAft>
-            </a:pPr>
-            <a:r>
-              <a:rPr sz="1500">
-                <a:solidFill>
-                  <a:srgbClr val="22282E"/>
-                </a:solidFill>
-              </a:rPr>
-              <a:t>•  msfconsole -q</a:t>
+              <a:t>•  Exploit: módulo que aprovecha una vulnerabilidad específica de un servicio o software. Característica clave: siempre se combina con un payload para lograr ejecución de código en el objetivo.</a:t>
+            </a:r>
+          </a:p>
+          <a:p>
+            <a:pPr>
+              <a:spcAft>
+                <a:spcPts val="600"/>
+              </a:spcAft>
+            </a:pPr>
+            <a:r>
+              <a:rPr sz="1500">
+                <a:solidFill>
+                  <a:srgbClr val="22282E"/>
+                </a:solidFill>
+              </a:rPr>
+              <a:t>•  Payload: código que se ejecuta tras una explotación exitosa (ej. shell de comandos, Meterpreter). Característica clave: puede ser staged (se envía en etapas) o stageless (se envía completo de una…</a:t>
+            </a:r>
+          </a:p>
+          <a:p>
+            <a:pPr>
+              <a:spcAft>
+                <a:spcPts val="600"/>
+              </a:spcAft>
+            </a:pPr>
+            <a:r>
+              <a:rPr sz="1500">
+                <a:solidFill>
+                  <a:srgbClr val="22282E"/>
+                </a:solidFill>
+              </a:rPr>
+              <a:t>•  Auxiliary: módulo sin payload asociado, usado para escaneo, fuzzing o fuerza bruta. Característica clave: es la herramienta principal para enumeración profunda dentro del propio framework.</a:t>
+            </a:r>
+          </a:p>
+          <a:p>
+            <a:pPr>
+              <a:spcAft>
+                <a:spcPts val="600"/>
+              </a:spcAft>
+            </a:pPr>
+            <a:r>
+              <a:rPr sz="1500">
+                <a:solidFill>
+                  <a:srgbClr val="22282E"/>
+                </a:solidFill>
+              </a:rPr>
+              <a:t>•  Post: módulo que se ejecuta sobre una sesión ya establecida. Característica clave: automatiza tareas de post-explotación como recolección de credenciales o información del sistema.</a:t>
+            </a:r>
+          </a:p>
+          <a:p>
+            <a:pPr>
+              <a:spcAft>
+                <a:spcPts val="600"/>
+              </a:spcAft>
+            </a:pPr>
+            <a:r>
+              <a:rPr sz="1500">
+                <a:solidFill>
+                  <a:srgbClr val="22282E"/>
+                </a:solidFill>
+              </a:rPr>
+              <a:t>•  Datastore: almacén interno de variables de configuración (RHOSTS, LHOST, LPORT, etc.). Característica clave: setg fija un valor global visible para todos los módulos, mientras set lo fija solo para…</a:t>
+            </a:r>
+          </a:p>
+          <a:p>
+            <a:pPr>
+              <a:spcAft>
+                <a:spcPts val="600"/>
+              </a:spcAft>
+            </a:pPr>
+            <a:r>
+              <a:rPr sz="1500">
+                <a:solidFill>
+                  <a:srgbClr val="22282E"/>
+                </a:solidFill>
+              </a:rPr>
+              <a:t>•  Workspace: contenedor lógico dentro de la base de datos de Metasploit que agrupa hosts, servicios y hallazgos de un mismo engagement. Característica clave: separa físicamente los datos de distintos…</a:t>
+            </a:r>
+          </a:p>
+          <a:p>
+            <a:pPr>
+              <a:spcAft>
+                <a:spcPts val="600"/>
+              </a:spcAft>
+            </a:pPr>
+            <a:r>
+              <a:rPr sz="1500">
+                <a:solidFill>
+                  <a:srgbClr val="22282E"/>
+                </a:solidFill>
+              </a:rPr>
+              <a:t>•  msfdb: utilidad de inicialización y gestión de la base de datos PostgreSQL que respalda a Metasploit. Característica clave: sin ella, Metasploit funciona pero pierde persistencia entre sesiones.</a:t>
             </a:r>
           </a:p>
         </p:txBody>
@@ -4495,7 +4841,7 @@
                   <a:srgbClr val="0B3D2E"/>
                 </a:solidFill>
               </a:rPr>
-              <a:t>🧪 Laboratorio guiado</a:t>
+              <a:t>📔 Glosario</a:t>
             </a:r>
           </a:p>
         </p:txBody>
@@ -4533,97 +4879,97 @@
                   <a:srgbClr val="22282E"/>
                 </a:solidFill>
               </a:rPr>
-              <a:t>•  Arranca la consola y confirma el estado de la base de datos: msfconsole -q seguido de dbstatus.</a:t>
-            </a:r>
-          </a:p>
-          <a:p>
-            <a:pPr>
-              <a:spcAft>
-                <a:spcPts val="600"/>
-              </a:spcAft>
-            </a:pPr>
-            <a:r>
-              <a:rPr sz="1500">
-                <a:solidFill>
-                  <a:srgbClr val="22282E"/>
-                </a:solidFill>
-              </a:rPr>
-              <a:t>•  Crea y selecciona un workspace dedicado al laboratorio: workspace -a labparte3 y luego workspace labparte3.</a:t>
-            </a:r>
-          </a:p>
-          <a:p>
-            <a:pPr>
-              <a:spcAft>
-                <a:spcPts val="600"/>
-              </a:spcAft>
-            </a:pPr>
-            <a:r>
-              <a:rPr sz="1500">
-                <a:solidFill>
-                  <a:srgbClr val="22282E"/>
-                </a:solidFill>
-              </a:rPr>
-              <a:t>•  Ejecuta un escaneo de Nmap directamente desde Metasploit para poblar la base de datos: dbnmap -sV -p- 192.168.56.101.</a:t>
-            </a:r>
-          </a:p>
-          <a:p>
-            <a:pPr>
-              <a:spcAft>
-                <a:spcPts val="600"/>
-              </a:spcAft>
-            </a:pPr>
-            <a:r>
-              <a:rPr sz="1500">
-                <a:solidFill>
-                  <a:srgbClr val="22282E"/>
-                </a:solidFill>
-              </a:rPr>
-              <a:t>•  Revisa los datos importados con hosts y services; confirma que aparecen los puertos y versiones detectados.</a:t>
-            </a:r>
-          </a:p>
-          <a:p>
-            <a:pPr>
-              <a:spcAft>
-                <a:spcPts val="600"/>
-              </a:spcAft>
-            </a:pPr>
-            <a:r>
-              <a:rPr sz="1500">
-                <a:solidFill>
-                  <a:srgbClr val="22282E"/>
-                </a:solidFill>
-              </a:rPr>
-              <a:t>•  Busca módulos relacionados con un servicio identificado, por ejemplo vsftpd: search vsftpd.</a:t>
-            </a:r>
-          </a:p>
-          <a:p>
-            <a:pPr>
-              <a:spcAft>
-                <a:spcPts val="600"/>
-              </a:spcAft>
-            </a:pPr>
-            <a:r>
-              <a:rPr sz="1500">
-                <a:solidFill>
-                  <a:srgbClr val="22282E"/>
-                </a:solidFill>
-              </a:rPr>
-              <a:t>•  Selecciona el módulo correspondiente y revisa su documentación: use exploit/unix/ftp/vsftpd234backdoor seguido de info.</a:t>
-            </a:r>
-          </a:p>
-          <a:p>
-            <a:pPr>
-              <a:spcAft>
-                <a:spcPts val="600"/>
-              </a:spcAft>
-            </a:pPr>
-            <a:r>
-              <a:rPr sz="1500">
-                <a:solidFill>
-                  <a:srgbClr val="22282E"/>
-                </a:solidFill>
-              </a:rPr>
-              <a:t>•  Revisa las opciones requeridas con options y fíjalas: set RHOSTS 192.168.56.101.</a:t>
+              <a:t>•  Término — Definición concisa</a:t>
+            </a:r>
+          </a:p>
+          <a:p>
+            <a:pPr>
+              <a:spcAft>
+                <a:spcPts val="600"/>
+              </a:spcAft>
+            </a:pPr>
+            <a:r>
+              <a:rPr sz="1500">
+                <a:solidFill>
+                  <a:srgbClr val="22282E"/>
+                </a:solidFill>
+              </a:rPr>
+              <a:t>•  Metasploit Framework — Marco de explotación que estandariza la cadena de ataque</a:t>
+            </a:r>
+          </a:p>
+          <a:p>
+            <a:pPr>
+              <a:spcAft>
+                <a:spcPts val="600"/>
+              </a:spcAft>
+            </a:pPr>
+            <a:r>
+              <a:rPr sz="1500">
+                <a:solidFill>
+                  <a:srgbClr val="22282E"/>
+                </a:solidFill>
+              </a:rPr>
+              <a:t>•  Módulo — Unidad funcional del framework</a:t>
+            </a:r>
+          </a:p>
+          <a:p>
+            <a:pPr>
+              <a:spcAft>
+                <a:spcPts val="600"/>
+              </a:spcAft>
+            </a:pPr>
+            <a:r>
+              <a:rPr sz="1500">
+                <a:solidFill>
+                  <a:srgbClr val="22282E"/>
+                </a:solidFill>
+              </a:rPr>
+              <a:t>•  Exploit — Módulo que aprovecha una vulnerabilidad para lograr ejecución</a:t>
+            </a:r>
+          </a:p>
+          <a:p>
+            <a:pPr>
+              <a:spcAft>
+                <a:spcPts val="600"/>
+              </a:spcAft>
+            </a:pPr>
+            <a:r>
+              <a:rPr sz="1500">
+                <a:solidFill>
+                  <a:srgbClr val="22282E"/>
+                </a:solidFill>
+              </a:rPr>
+              <a:t>•  Payload — Código que se ejecuta tras el éxito del exploit</a:t>
+            </a:r>
+          </a:p>
+          <a:p>
+            <a:pPr>
+              <a:spcAft>
+                <a:spcPts val="600"/>
+              </a:spcAft>
+            </a:pPr>
+            <a:r>
+              <a:rPr sz="1500">
+                <a:solidFill>
+                  <a:srgbClr val="22282E"/>
+                </a:solidFill>
+              </a:rPr>
+              <a:t>•  Auxiliary — Módulo de escaneo, enumeración o fuzzing sin explotar</a:t>
+            </a:r>
+          </a:p>
+          <a:p>
+            <a:pPr>
+              <a:spcAft>
+                <a:spcPts val="600"/>
+              </a:spcAft>
+            </a:pPr>
+            <a:r>
+              <a:rPr sz="1500">
+                <a:solidFill>
+                  <a:srgbClr val="22282E"/>
+                </a:solidFill>
+              </a:rPr>
+              <a:t>•  Post — Módulo que opera sobre una sesión ya establecida</a:t>
             </a:r>
           </a:p>
         </p:txBody>
@@ -4674,7 +5020,7 @@
                   <a:srgbClr val="0B3D2E"/>
                 </a:solidFill>
               </a:rPr>
-              <a:t>✍️ Ejercicios</a:t>
+              <a:t>🧰 Herramientas y preparación</a:t>
             </a:r>
           </a:p>
         </p:txBody>
@@ -4712,82 +5058,67 @@
                   <a:srgbClr val="22282E"/>
                 </a:solidFill>
               </a:rPr>
-              <a:t>•  Explica la diferencia entre set y setg con un ejemplo concreto de RHOSTS y LHOST.</a:t>
-            </a:r>
-          </a:p>
-          <a:p>
-            <a:pPr>
-              <a:spcAft>
-                <a:spcPts val="600"/>
-              </a:spcAft>
-            </a:pPr>
-            <a:r>
-              <a:rPr sz="1500">
-                <a:solidFill>
-                  <a:srgbClr val="22282E"/>
-                </a:solidFill>
-              </a:rPr>
-              <a:t>•  Enumera los seis tipos de módulos de Metasploit y da un caso de uso real de cada uno.</a:t>
-            </a:r>
-          </a:p>
-          <a:p>
-            <a:pPr>
-              <a:spcAft>
-                <a:spcPts val="600"/>
-              </a:spcAft>
-            </a:pPr>
-            <a:r>
-              <a:rPr sz="1500">
-                <a:solidFill>
-                  <a:srgbClr val="22282E"/>
-                </a:solidFill>
-              </a:rPr>
-              <a:t>•  Importa un archivo XML de Nmap generado previamente con dbimport y verifica los hosts cargados.</a:t>
-            </a:r>
-          </a:p>
-          <a:p>
-            <a:pPr>
-              <a:spcAft>
-                <a:spcPts val="600"/>
-              </a:spcAft>
-            </a:pPr>
-            <a:r>
-              <a:rPr sz="1500">
-                <a:solidFill>
-                  <a:srgbClr val="22282E"/>
-                </a:solidFill>
-              </a:rPr>
-              <a:t>•  Usa un módulo auxiliar para detectar la versión de SSH del objetivo de laboratorio.</a:t>
-            </a:r>
-          </a:p>
-          <a:p>
-            <a:pPr>
-              <a:spcAft>
-                <a:spcPts val="600"/>
-              </a:spcAft>
-            </a:pPr>
-            <a:r>
-              <a:rPr sz="1500">
-                <a:solidFill>
-                  <a:srgbClr val="22282E"/>
-                </a:solidFill>
-              </a:rPr>
-              <a:t>•  Crea dos workspaces distintos y demuestra, mostrando hosts en cada uno, que los datos no se mezclan.</a:t>
-            </a:r>
-          </a:p>
-          <a:p>
-            <a:pPr>
-              <a:spcAft>
-                <a:spcPts val="600"/>
-              </a:spcAft>
-            </a:pPr>
-            <a:r>
-              <a:rPr sz="1500">
-                <a:solidFill>
-                  <a:srgbClr val="22282E"/>
-                </a:solidFill>
-              </a:rPr>
-              <a:t>•  Filtra módulos con search combinando type:exploit y platform:unix y explica qué representa cada filtro.</a:t>
+              <a:t>•  Kali Linux o Parrot OS con Metasploit Framework preinstalado (msfconsole --version para confirmar).</a:t>
+            </a:r>
+          </a:p>
+          <a:p>
+            <a:pPr>
+              <a:spcAft>
+                <a:spcPts val="600"/>
+              </a:spcAft>
+            </a:pPr>
+            <a:r>
+              <a:rPr sz="1500">
+                <a:solidFill>
+                  <a:srgbClr val="22282E"/>
+                </a:solidFill>
+              </a:rPr>
+              <a:t>•  PostgreSQL como backend de base de datos, gestionado por msfdb.</a:t>
+            </a:r>
+          </a:p>
+          <a:p>
+            <a:pPr>
+              <a:spcAft>
+                <a:spcPts val="600"/>
+              </a:spcAft>
+            </a:pPr>
+            <a:r>
+              <a:rPr sz="1500">
+                <a:solidFill>
+                  <a:srgbClr val="22282E"/>
+                </a:solidFill>
+              </a:rPr>
+              <a:t>•  Metasploitable2 desplegada en una red interna aislada (host-only) como objetivo de laboratorio.</a:t>
+            </a:r>
+          </a:p>
+          <a:p>
+            <a:pPr>
+              <a:spcAft>
+                <a:spcPts val="600"/>
+              </a:spcAft>
+            </a:pPr>
+            <a:r>
+              <a:rPr sz="1500">
+                <a:solidFill>
+                  <a:srgbClr val="22282E"/>
+                </a:solidFill>
+              </a:rPr>
+              <a:t>•  Nmap para el reconocimiento previo que luego se importará a Metasploit.</a:t>
+            </a:r>
+          </a:p>
+          <a:p>
+            <a:pPr>
+              <a:spcAft>
+                <a:spcPts val="600"/>
+              </a:spcAft>
+            </a:pPr>
+            <a:r>
+              <a:rPr sz="1500">
+                <a:solidFill>
+                  <a:srgbClr val="22282E"/>
+                </a:solidFill>
+              </a:rPr>
+              <a:t>•  Inicialización recomendada:</a:t>
             </a:r>
           </a:p>
         </p:txBody>
@@ -4838,7 +5169,7 @@
                   <a:srgbClr val="0B3D2E"/>
                 </a:solidFill>
               </a:rPr>
-              <a:t>📝 Reto verificable</a:t>
+              <a:t>🧪 Laboratorio guiado</a:t>
             </a:r>
           </a:p>
         </p:txBody>
@@ -4876,22 +5207,97 @@
                   <a:srgbClr val="22282E"/>
                 </a:solidFill>
               </a:rPr>
-              <a:t>•  Reto: Dejar un workspace de laboratorio completamente poblado: hosts descubiertos, servicios con versión importados desde Nmap, y al menos un módulo auxiliar ejecutado con su resultado documentado.</a:t>
-            </a:r>
-          </a:p>
-          <a:p>
-            <a:pPr>
-              <a:spcAft>
-                <a:spcPts val="600"/>
-              </a:spcAft>
-            </a:pPr>
-            <a:r>
-              <a:rPr sz="1500">
-                <a:solidFill>
-                  <a:srgbClr val="22282E"/>
-                </a:solidFill>
-              </a:rPr>
-              <a:t>•  Criterio de aceptación: el comando hosts muestra el objetivo de laboratorio, services lista al menos tres servicios con su versión, y existe al menos una entrada generada por un módulo auxiliar visible en notes o vulns. Todo debe estar contenido dentro de un workspace nombrado explícitamente (no en default).</a:t>
+              <a:t>•  Arranca la consola y confirma el estado de la base de datos: msfconsole -q seguido de dbstatus.</a:t>
+            </a:r>
+          </a:p>
+          <a:p>
+            <a:pPr>
+              <a:spcAft>
+                <a:spcPts val="600"/>
+              </a:spcAft>
+            </a:pPr>
+            <a:r>
+              <a:rPr sz="1500">
+                <a:solidFill>
+                  <a:srgbClr val="22282E"/>
+                </a:solidFill>
+              </a:rPr>
+              <a:t>•  Crea y selecciona un workspace dedicado al laboratorio: workspace -a labparte3 y luego workspace labparte3.</a:t>
+            </a:r>
+          </a:p>
+          <a:p>
+            <a:pPr>
+              <a:spcAft>
+                <a:spcPts val="600"/>
+              </a:spcAft>
+            </a:pPr>
+            <a:r>
+              <a:rPr sz="1500">
+                <a:solidFill>
+                  <a:srgbClr val="22282E"/>
+                </a:solidFill>
+              </a:rPr>
+              <a:t>•  Ejecuta un escaneo de Nmap directamente desde Metasploit para poblar la base de datos: dbnmap -sV -p- 192.168.56.101.</a:t>
+            </a:r>
+          </a:p>
+          <a:p>
+            <a:pPr>
+              <a:spcAft>
+                <a:spcPts val="600"/>
+              </a:spcAft>
+            </a:pPr>
+            <a:r>
+              <a:rPr sz="1500">
+                <a:solidFill>
+                  <a:srgbClr val="22282E"/>
+                </a:solidFill>
+              </a:rPr>
+              <a:t>•  Revisa los datos importados con hosts y services; confirma que aparecen los puertos y versiones detectados.</a:t>
+            </a:r>
+          </a:p>
+          <a:p>
+            <a:pPr>
+              <a:spcAft>
+                <a:spcPts val="600"/>
+              </a:spcAft>
+            </a:pPr>
+            <a:r>
+              <a:rPr sz="1500">
+                <a:solidFill>
+                  <a:srgbClr val="22282E"/>
+                </a:solidFill>
+              </a:rPr>
+              <a:t>•  Busca módulos relacionados con un servicio identificado, por ejemplo vsftpd: search vsftpd.</a:t>
+            </a:r>
+          </a:p>
+          <a:p>
+            <a:pPr>
+              <a:spcAft>
+                <a:spcPts val="600"/>
+              </a:spcAft>
+            </a:pPr>
+            <a:r>
+              <a:rPr sz="1500">
+                <a:solidFill>
+                  <a:srgbClr val="22282E"/>
+                </a:solidFill>
+              </a:rPr>
+              <a:t>•  Selecciona el módulo correspondiente y revisa su documentación: use exploit/unix/ftp/vsftpd234backdoor seguido de info.</a:t>
+            </a:r>
+          </a:p>
+          <a:p>
+            <a:pPr>
+              <a:spcAft>
+                <a:spcPts val="600"/>
+              </a:spcAft>
+            </a:pPr>
+            <a:r>
+              <a:rPr sz="1500">
+                <a:solidFill>
+                  <a:srgbClr val="22282E"/>
+                </a:solidFill>
+              </a:rPr>
+              <a:t>•  Revisa las opciones requeridas con options y fíjalas: set RHOSTS 192.168.56.101.</a:t>
             </a:r>
           </a:p>
         </p:txBody>
